--- a/output/education/2026-03-30_cognitive-bias-diagnostic-reasoning/cognitive-bias_slides_allstaff.pptx
+++ b/output/education/2026-03-30_cognitive-bias-diagnostic-reasoning/cognitive-bias_slides_allstaff.pptx
@@ -3136,6 +3136,7 @@
               </a:defRPr>
             </a:pPr>
             <a:r>
+              <a:rPr/>
               <a:t>認知バイアスと日常の判断</a:t>
             </a:r>
           </a:p>
@@ -3172,6 +3173,7 @@
               </a:defRPr>
             </a:pPr>
             <a:r>
+              <a:rPr/>
               <a:t>— なぜ優秀な人でも間違えるのか</a:t>
             </a:r>
           </a:p>
@@ -3216,7 +3218,9 @@
           <a:bodyPr rtlCol="0" anchor="ctr"/>
           <a:lstStyle/>
           <a:p>
-            <a:pPr algn="ctr"/>
+            <a:pPr algn="ctr">
+              <a:defRPr/>
+            </a:pPr>
           </a:p>
         </p:txBody>
       </p:sp>
@@ -3251,6 +3255,7 @@
               </a:defRPr>
             </a:pPr>
             <a:r>
+              <a:rPr/>
               <a:t>20分 | 全スタッフ向け | ガニェ事象1: 注意の獲得</a:t>
             </a:r>
           </a:p>
@@ -3295,7 +3300,9 @@
           <a:bodyPr rtlCol="0" anchor="ctr"/>
           <a:lstStyle/>
           <a:p>
-            <a:pPr algn="ctr"/>
+            <a:pPr algn="ctr">
+              <a:defRPr/>
+            </a:pPr>
           </a:p>
         </p:txBody>
       </p:sp>
@@ -3340,7 +3347,9 @@
           <a:bodyPr rtlCol="0" anchor="ctr"/>
           <a:lstStyle/>
           <a:p>
-            <a:pPr algn="ctr"/>
+            <a:pPr algn="ctr">
+              <a:defRPr/>
+            </a:pPr>
           </a:p>
         </p:txBody>
       </p:sp>
@@ -3375,14 +3384,17 @@
               </a:defRPr>
             </a:pPr>
             <a:r>
+              <a:rPr/>
               <a:t>ベテランの医師が「完全に確信がある」と言った</a:t>
             </a:r>
             <a:br/>
             <a:r>
+              <a:rPr/>
               <a:t>診断の40%が間違いだった</a:t>
             </a:r>
             <a:br/>
             <a:r>
+              <a:rPr/>
               <a:t>——能力の問題ではなく、脳の仕組みの問題</a:t>
             </a:r>
           </a:p>
@@ -3397,7 +3409,7 @@
         <p:spPr>
           <a:xfrm>
             <a:off x="731520" y="4114800"/>
-            <a:ext cx="7680960" cy="274320"/>
+            <a:ext cx="7680960" cy="287020"/>
           </a:xfrm>
           <a:prstGeom prst="rect">
             <a:avLst/>
@@ -3419,6 +3431,7 @@
               </a:defRPr>
             </a:pPr>
             <a:r>
+              <a:rPr/>
               <a:t>航空業界: パイロットの「ミス」を「ヒューマンファクター」と再定義 → 事故激減</a:t>
             </a:r>
           </a:p>
@@ -3458,8 +3471,8 @@
         </p:nvSpPr>
         <p:spPr>
           <a:xfrm>
-            <a:off x="457200" y="274320"/>
-            <a:ext cx="8229600" cy="457200"/>
+            <a:off x="457200" y="384048"/>
+            <a:ext cx="8229600" cy="482600"/>
           </a:xfrm>
           <a:prstGeom prst="rect">
             <a:avLst/>
@@ -3481,6 +3494,7 @@
               </a:defRPr>
             </a:pPr>
             <a:r>
+              <a:rPr/>
               <a:t>明日からのアクション</a:t>
             </a:r>
           </a:p>
@@ -3525,7 +3539,9 @@
           <a:bodyPr rtlCol="0" anchor="ctr"/>
           <a:lstStyle/>
           <a:p>
-            <a:pPr algn="ctr"/>
+            <a:pPr algn="ctr">
+              <a:defRPr/>
+            </a:pPr>
           </a:p>
         </p:txBody>
       </p:sp>
@@ -3560,6 +3576,7 @@
               </a:defRPr>
             </a:pPr>
             <a:r>
+              <a:rPr/>
               <a:t>[ガニェ事象8/9: 評価＋保持と転移]</a:t>
             </a:r>
           </a:p>
@@ -3930,7 +3947,9 @@
           <a:bodyPr rtlCol="0" anchor="ctr"/>
           <a:lstStyle/>
           <a:p>
-            <a:pPr algn="ctr"/>
+            <a:pPr algn="ctr">
+              <a:defRPr/>
+            </a:pPr>
           </a:p>
         </p:txBody>
       </p:sp>
@@ -3975,7 +3994,9 @@
           <a:bodyPr rtlCol="0" anchor="ctr"/>
           <a:lstStyle/>
           <a:p>
-            <a:pPr algn="ctr"/>
+            <a:pPr algn="ctr">
+              <a:defRPr/>
+            </a:pPr>
           </a:p>
         </p:txBody>
       </p:sp>
@@ -4010,10 +4031,12 @@
               </a:defRPr>
             </a:pPr>
             <a:r>
+              <a:rPr/>
               <a:t>バイアスは脳の仕組み。</a:t>
             </a:r>
             <a:br/>
             <a:r>
+              <a:rPr/>
               <a:t>「気をつける」だけでは防げない。仕組みで防ぐ。</a:t>
             </a:r>
           </a:p>
@@ -4050,6 +4073,7 @@
               </a:defRPr>
             </a:pPr>
             <a:r>
+              <a:rPr/>
               <a:t>参考: Kahneman (2011) ファスト＆スロー / Saposnik et al. (2016) BMC Medical Informatics</a:t>
             </a:r>
           </a:p>
@@ -4089,8 +4113,8 @@
         </p:nvSpPr>
         <p:spPr>
           <a:xfrm>
-            <a:off x="457200" y="274320"/>
-            <a:ext cx="8229600" cy="457200"/>
+            <a:off x="457200" y="384048"/>
+            <a:ext cx="8229600" cy="482600"/>
           </a:xfrm>
           <a:prstGeom prst="rect">
             <a:avLst/>
@@ -4112,6 +4136,7 @@
               </a:defRPr>
             </a:pPr>
             <a:r>
+              <a:rPr/>
               <a:t>学習目標</a:t>
             </a:r>
           </a:p>
@@ -4156,7 +4181,9 @@
           <a:bodyPr rtlCol="0" anchor="ctr"/>
           <a:lstStyle/>
           <a:p>
-            <a:pPr algn="ctr"/>
+            <a:pPr algn="ctr">
+              <a:defRPr/>
+            </a:pPr>
           </a:p>
         </p:txBody>
       </p:sp>
@@ -4191,6 +4218,7 @@
               </a:defRPr>
             </a:pPr>
             <a:r>
+              <a:rPr/>
               <a:t>[ガニェ事象2: 目標の提示]</a:t>
             </a:r>
           </a:p>
@@ -4235,7 +4263,9 @@
           <a:bodyPr rtlCol="0" anchor="ctr"/>
           <a:lstStyle/>
           <a:p>
-            <a:pPr algn="ctr"/>
+            <a:pPr algn="ctr">
+              <a:defRPr/>
+            </a:pPr>
           </a:p>
         </p:txBody>
       </p:sp>
@@ -4270,6 +4300,7 @@
               </a:defRPr>
             </a:pPr>
             <a:r>
+              <a:rPr/>
               <a:t>1</a:t>
             </a:r>
           </a:p>
@@ -4306,6 +4337,7 @@
               </a:defRPr>
             </a:pPr>
             <a:r>
+              <a:rPr/>
               <a:t>説明できる</a:t>
             </a:r>
           </a:p>
@@ -4342,10 +4374,12 @@
               </a:defRPr>
             </a:pPr>
             <a:r>
+              <a:rPr/>
               <a:t>認知バイアスが「個人のミス」ではなく</a:t>
             </a:r>
             <a:br/>
             <a:r>
+              <a:rPr/>
               <a:t>「脳の仕組み」であることを説明できる</a:t>
             </a:r>
           </a:p>
@@ -4390,7 +4424,9 @@
           <a:bodyPr rtlCol="0" anchor="ctr"/>
           <a:lstStyle/>
           <a:p>
-            <a:pPr algn="ctr"/>
+            <a:pPr algn="ctr">
+              <a:defRPr/>
+            </a:pPr>
           </a:p>
         </p:txBody>
       </p:sp>
@@ -4425,6 +4461,7 @@
               </a:defRPr>
             </a:pPr>
             <a:r>
+              <a:rPr/>
               <a:t>2</a:t>
             </a:r>
           </a:p>
@@ -4461,6 +4498,7 @@
               </a:defRPr>
             </a:pPr>
             <a:r>
+              <a:rPr/>
               <a:t>実践できる</a:t>
             </a:r>
           </a:p>
@@ -4497,10 +4535,12 @@
               </a:defRPr>
             </a:pPr>
             <a:r>
+              <a:rPr/>
               <a:t>日常業務で1つ、バイアスを防ぐ</a:t>
             </a:r>
             <a:br/>
             <a:r>
+              <a:rPr/>
               <a:t>具体的な方法を実践できる</a:t>
             </a:r>
           </a:p>
@@ -4545,7 +4585,9 @@
           <a:bodyPr rtlCol="0" anchor="ctr"/>
           <a:lstStyle/>
           <a:p>
-            <a:pPr algn="ctr"/>
+            <a:pPr algn="ctr">
+              <a:defRPr/>
+            </a:pPr>
           </a:p>
         </p:txBody>
       </p:sp>
@@ -4580,6 +4622,7 @@
               </a:defRPr>
             </a:pPr>
             <a:r>
+              <a:rPr/>
               <a:t>3</a:t>
             </a:r>
           </a:p>
@@ -4616,6 +4659,7 @@
               </a:defRPr>
             </a:pPr>
             <a:r>
+              <a:rPr/>
               <a:t>評価できる</a:t>
             </a:r>
           </a:p>
@@ -4652,10 +4696,12 @@
               </a:defRPr>
             </a:pPr>
             <a:r>
+              <a:rPr/>
               <a:t>チームでの安全確認の仕組みが</a:t>
             </a:r>
             <a:br/>
             <a:r>
+              <a:rPr/>
               <a:t>機能しているか振り返れる</a:t>
             </a:r>
           </a:p>
@@ -4695,8 +4741,8 @@
         </p:nvSpPr>
         <p:spPr>
           <a:xfrm>
-            <a:off x="457200" y="274320"/>
-            <a:ext cx="8229600" cy="457200"/>
+            <a:off x="457200" y="384048"/>
+            <a:ext cx="8229600" cy="482600"/>
           </a:xfrm>
           <a:prstGeom prst="rect">
             <a:avLst/>
@@ -4718,6 +4764,7 @@
               </a:defRPr>
             </a:pPr>
             <a:r>
+              <a:rPr/>
               <a:t>速い脳と遅い脳</a:t>
             </a:r>
           </a:p>
@@ -4762,7 +4809,9 @@
           <a:bodyPr rtlCol="0" anchor="ctr"/>
           <a:lstStyle/>
           <a:p>
-            <a:pPr algn="ctr"/>
+            <a:pPr algn="ctr">
+              <a:defRPr/>
+            </a:pPr>
           </a:p>
         </p:txBody>
       </p:sp>
@@ -4797,6 +4846,7 @@
               </a:defRPr>
             </a:pPr>
             <a:r>
+              <a:rPr/>
               <a:t>[ガニェ事象3: 前提知識の想起]</a:t>
             </a:r>
           </a:p>
@@ -4843,7 +4893,9 @@
           <a:bodyPr rtlCol="0" anchor="ctr"/>
           <a:lstStyle/>
           <a:p>
-            <a:pPr algn="ctr"/>
+            <a:pPr algn="ctr">
+              <a:defRPr/>
+            </a:pPr>
           </a:p>
         </p:txBody>
       </p:sp>
@@ -4878,6 +4930,7 @@
               </a:defRPr>
             </a:pPr>
             <a:r>
+              <a:rPr/>
               <a:t>速い脳（System 1）</a:t>
             </a:r>
           </a:p>
@@ -4914,14 +4967,17 @@
               </a:defRPr>
             </a:pPr>
             <a:r>
+              <a:rPr/>
               <a:t>一瞬で判断 / 省エネ</a:t>
             </a:r>
             <a:br/>
             <a:r>
+              <a:rPr/>
               <a:t>「あ、この人怒ってる」と表情で察する</a:t>
             </a:r>
             <a:br/>
             <a:r>
+              <a:rPr/>
               <a:t>「いつもと様子が違う」と感じる</a:t>
             </a:r>
           </a:p>
@@ -4968,7 +5024,9 @@
           <a:bodyPr rtlCol="0" anchor="ctr"/>
           <a:lstStyle/>
           <a:p>
-            <a:pPr algn="ctr"/>
+            <a:pPr algn="ctr">
+              <a:defRPr/>
+            </a:pPr>
           </a:p>
         </p:txBody>
       </p:sp>
@@ -5003,6 +5061,7 @@
               </a:defRPr>
             </a:pPr>
             <a:r>
+              <a:rPr/>
               <a:t>遅い脳（System 2）</a:t>
             </a:r>
           </a:p>
@@ -5039,14 +5098,17 @@
               </a:defRPr>
             </a:pPr>
             <a:r>
+              <a:rPr/>
               <a:t>じっくり考える / エネルギー大量消費</a:t>
             </a:r>
             <a:br/>
             <a:r>
+              <a:rPr/>
               <a:t>「78×34は…」と計算する</a:t>
             </a:r>
             <a:br/>
             <a:r>
+              <a:rPr/>
               <a:t>薬の量をダブルチェックする</a:t>
             </a:r>
           </a:p>
@@ -5083,6 +5145,7 @@
               </a:defRPr>
             </a:pPr>
             <a:r>
+              <a:rPr/>
               <a:t>速い脳は優秀 — 仕事の大半はこれで回っている</a:t>
             </a:r>
           </a:p>
@@ -5119,6 +5182,7 @@
               </a:defRPr>
             </a:pPr>
             <a:r>
+              <a:rPr/>
               <a:t>でも時々間違える — それが「認知バイアス」。誰にでも起きる</a:t>
             </a:r>
           </a:p>
@@ -5158,7 +5222,7 @@
         </p:nvSpPr>
         <p:spPr>
           <a:xfrm>
-            <a:off x="457200" y="274320"/>
+            <a:off x="457200" y="384048"/>
             <a:ext cx="8229600" cy="457200"/>
           </a:xfrm>
           <a:prstGeom prst="rect">
@@ -5181,6 +5245,7 @@
               </a:defRPr>
             </a:pPr>
             <a:r>
+              <a:rPr/>
               <a:t>日常業務で起きるバイアス4つ</a:t>
             </a:r>
           </a:p>
@@ -5225,7 +5290,9 @@
           <a:bodyPr rtlCol="0" anchor="ctr"/>
           <a:lstStyle/>
           <a:p>
-            <a:pPr algn="ctr"/>
+            <a:pPr algn="ctr">
+              <a:defRPr/>
+            </a:pPr>
           </a:p>
         </p:txBody>
       </p:sp>
@@ -5260,6 +5327,7 @@
               </a:defRPr>
             </a:pPr>
             <a:r>
+              <a:rPr/>
               <a:t>[ガニェ事象4: 新しい内容を提示する]</a:t>
             </a:r>
           </a:p>
@@ -5304,7 +5372,9 @@
           <a:bodyPr rtlCol="0" anchor="ctr"/>
           <a:lstStyle/>
           <a:p>
-            <a:pPr algn="ctr"/>
+            <a:pPr algn="ctr">
+              <a:defRPr/>
+            </a:pPr>
           </a:p>
         </p:txBody>
       </p:sp>
@@ -5339,10 +5409,12 @@
               </a:defRPr>
             </a:pPr>
             <a:r>
+              <a:rPr/>
               <a:t>確認バイアス</a:t>
             </a:r>
             <a:br/>
             <a:r>
+              <a:rPr/>
               <a:t>「思い込みメガネ」</a:t>
             </a:r>
           </a:p>
@@ -5379,10 +5451,12 @@
               </a:defRPr>
             </a:pPr>
             <a:r>
+              <a:rPr/>
               <a:t>仕事: 「いつも大げさ」→ 本当の痛みを聞き逃す</a:t>
             </a:r>
             <a:br/>
             <a:r>
+              <a:rPr/>
               <a:t>日常: 「あの店はまずい」→ 美味しい料理も気づかない</a:t>
             </a:r>
           </a:p>
@@ -5427,7 +5501,9 @@
           <a:bodyPr rtlCol="0" anchor="ctr"/>
           <a:lstStyle/>
           <a:p>
-            <a:pPr algn="ctr"/>
+            <a:pPr algn="ctr">
+              <a:defRPr/>
+            </a:pPr>
           </a:p>
         </p:txBody>
       </p:sp>
@@ -5462,10 +5538,12 @@
               </a:defRPr>
             </a:pPr>
             <a:r>
+              <a:rPr/>
               <a:t>アンカリング</a:t>
             </a:r>
             <a:br/>
             <a:r>
+              <a:rPr/>
               <a:t>「最初に引きずられる」</a:t>
             </a:r>
           </a:p>
@@ -5502,10 +5580,12 @@
               </a:defRPr>
             </a:pPr>
             <a:r>
+              <a:rPr/>
               <a:t>仕事: 申し送りで「発熱なし」→ 37.8℃でも軽視</a:t>
             </a:r>
             <a:br/>
             <a:r>
+              <a:rPr/>
               <a:t>日常: セール「50%OFF」→ 元値が高くてもお得に感じる</a:t>
             </a:r>
           </a:p>
@@ -5550,7 +5630,9 @@
           <a:bodyPr rtlCol="0" anchor="ctr"/>
           <a:lstStyle/>
           <a:p>
-            <a:pPr algn="ctr"/>
+            <a:pPr algn="ctr">
+              <a:defRPr/>
+            </a:pPr>
           </a:p>
         </p:txBody>
       </p:sp>
@@ -5585,10 +5667,12 @@
               </a:defRPr>
             </a:pPr>
             <a:r>
+              <a:rPr/>
               <a:t>利用可能性</a:t>
             </a:r>
             <a:br/>
             <a:r>
+              <a:rPr/>
               <a:t>「最近に引っぱられる」</a:t>
             </a:r>
           </a:p>
@@ -5625,10 +5709,12 @@
               </a:defRPr>
             </a:pPr>
             <a:r>
+              <a:rPr/>
               <a:t>仕事: 先週転倒事故 → 転倒ばかり気にして他を見落とす</a:t>
             </a:r>
             <a:br/>
             <a:r>
+              <a:rPr/>
               <a:t>日常: 飛行機事故のニュース → 飛行機が怖くなる</a:t>
             </a:r>
           </a:p>
@@ -5673,7 +5759,9 @@
           <a:bodyPr rtlCol="0" anchor="ctr"/>
           <a:lstStyle/>
           <a:p>
-            <a:pPr algn="ctr"/>
+            <a:pPr algn="ctr">
+              <a:defRPr/>
+            </a:pPr>
           </a:p>
         </p:txBody>
       </p:sp>
@@ -5708,10 +5796,12 @@
               </a:defRPr>
             </a:pPr>
             <a:r>
+              <a:rPr/>
               <a:t>過信</a:t>
             </a:r>
             <a:br/>
             <a:r>
+              <a:rPr/>
               <a:t>「わかったつもり」</a:t>
             </a:r>
           </a:p>
@@ -5748,10 +5838,12 @@
               </a:defRPr>
             </a:pPr>
             <a:r>
+              <a:rPr/>
               <a:t>仕事: 「何度も扱った薬」→ 確認省略でインシデント</a:t>
             </a:r>
             <a:br/>
             <a:r>
+              <a:rPr/>
               <a:t>注意: 経験が増えるほど確認を省きやすくなる</a:t>
             </a:r>
           </a:p>
@@ -5791,7 +5883,7 @@
         </p:nvSpPr>
         <p:spPr>
           <a:xfrm>
-            <a:off x="457200" y="274320"/>
+            <a:off x="457200" y="384048"/>
             <a:ext cx="8229600" cy="457200"/>
           </a:xfrm>
           <a:prstGeom prst="rect">
@@ -5814,6 +5906,7 @@
               </a:defRPr>
             </a:pPr>
             <a:r>
+              <a:rPr/>
               <a:t>4つのバイアスまとめ</a:t>
             </a:r>
           </a:p>
@@ -5858,7 +5951,9 @@
           <a:bodyPr rtlCol="0" anchor="ctr"/>
           <a:lstStyle/>
           <a:p>
-            <a:pPr algn="ctr"/>
+            <a:pPr algn="ctr">
+              <a:defRPr/>
+            </a:pPr>
           </a:p>
         </p:txBody>
       </p:sp>
@@ -5893,6 +5988,7 @@
               </a:defRPr>
             </a:pPr>
             <a:r>
+              <a:rPr/>
               <a:t>[ガニェ事象5: 学習の指針を与える]</a:t>
             </a:r>
           </a:p>
@@ -6326,6 +6422,7 @@
               </a:defRPr>
             </a:pPr>
             <a:r>
+              <a:rPr/>
               <a:t>共通点: どれも速い脳の「省エネモード」が原因</a:t>
             </a:r>
           </a:p>
@@ -6362,6 +6459,7 @@
               </a:defRPr>
             </a:pPr>
             <a:r>
+              <a:rPr/>
               <a:t>対策の基本: 意識的に遅い脳のスイッチを入れるタイミングを作る</a:t>
             </a:r>
           </a:p>
@@ -6401,7 +6499,7 @@
         </p:nvSpPr>
         <p:spPr>
           <a:xfrm>
-            <a:off x="457200" y="274320"/>
+            <a:off x="457200" y="384048"/>
             <a:ext cx="8229600" cy="457200"/>
           </a:xfrm>
           <a:prstGeom prst="rect">
@@ -6424,6 +6522,7 @@
               </a:defRPr>
             </a:pPr>
             <a:r>
+              <a:rPr/>
               <a:t>チームでバイアスを防ぐ — 5つの問い</a:t>
             </a:r>
           </a:p>
@@ -6468,7 +6567,9 @@
           <a:bodyPr rtlCol="0" anchor="ctr"/>
           <a:lstStyle/>
           <a:p>
-            <a:pPr algn="ctr"/>
+            <a:pPr algn="ctr">
+              <a:defRPr/>
+            </a:pPr>
           </a:p>
         </p:txBody>
       </p:sp>
@@ -6503,6 +6604,7 @@
               </a:defRPr>
             </a:pPr>
             <a:r>
+              <a:rPr/>
               <a:t>[ガニェ事象5: 学習の指針を与える]</a:t>
             </a:r>
           </a:p>
@@ -6547,7 +6649,9 @@
           <a:bodyPr rtlCol="0" anchor="ctr"/>
           <a:lstStyle/>
           <a:p>
-            <a:pPr algn="ctr"/>
+            <a:pPr algn="ctr">
+              <a:defRPr/>
+            </a:pPr>
           </a:p>
         </p:txBody>
       </p:sp>
@@ -6582,6 +6686,7 @@
               </a:defRPr>
             </a:pPr>
             <a:r>
+              <a:rPr/>
               <a:t>1</a:t>
             </a:r>
           </a:p>
@@ -6596,7 +6701,7 @@
         <p:spPr>
           <a:xfrm>
             <a:off x="1188720" y="914400"/>
-            <a:ext cx="3657600" cy="274320"/>
+            <a:ext cx="3657600" cy="301752"/>
           </a:xfrm>
           <a:prstGeom prst="rect">
             <a:avLst/>
@@ -6618,6 +6723,7 @@
               </a:defRPr>
             </a:pPr>
             <a:r>
+              <a:rPr/>
               <a:t>「他に何かない？」</a:t>
             </a:r>
           </a:p>
@@ -6654,6 +6760,7 @@
               </a:defRPr>
             </a:pPr>
             <a:r>
+              <a:rPr/>
               <a:t>確認バイアス対策</a:t>
             </a:r>
           </a:p>
@@ -6690,6 +6797,7 @@
               </a:defRPr>
             </a:pPr>
             <a:r>
+              <a:rPr/>
               <a:t>最初の判断以外の可能性を1つ考える</a:t>
             </a:r>
           </a:p>
@@ -6734,7 +6842,9 @@
           <a:bodyPr rtlCol="0" anchor="ctr"/>
           <a:lstStyle/>
           <a:p>
-            <a:pPr algn="ctr"/>
+            <a:pPr algn="ctr">
+              <a:defRPr/>
+            </a:pPr>
           </a:p>
         </p:txBody>
       </p:sp>
@@ -6769,6 +6879,7 @@
               </a:defRPr>
             </a:pPr>
             <a:r>
+              <a:rPr/>
               <a:t>2</a:t>
             </a:r>
           </a:p>
@@ -6783,7 +6894,7 @@
         <p:spPr>
           <a:xfrm>
             <a:off x="1188720" y="1645920"/>
-            <a:ext cx="3657600" cy="274320"/>
+            <a:ext cx="3657600" cy="301751"/>
           </a:xfrm>
           <a:prstGeom prst="rect">
             <a:avLst/>
@@ -6805,6 +6916,7 @@
               </a:defRPr>
             </a:pPr>
             <a:r>
+              <a:rPr/>
               <a:t>「最初の印象に引きずられてない？」</a:t>
             </a:r>
           </a:p>
@@ -6841,6 +6953,7 @@
               </a:defRPr>
             </a:pPr>
             <a:r>
+              <a:rPr/>
               <a:t>アンカリング対策</a:t>
             </a:r>
           </a:p>
@@ -6877,6 +6990,7 @@
               </a:defRPr>
             </a:pPr>
             <a:r>
+              <a:rPr/>
               <a:t>前の情報をリセットして見直す</a:t>
             </a:r>
           </a:p>
@@ -6921,7 +7035,9 @@
           <a:bodyPr rtlCol="0" anchor="ctr"/>
           <a:lstStyle/>
           <a:p>
-            <a:pPr algn="ctr"/>
+            <a:pPr algn="ctr">
+              <a:defRPr/>
+            </a:pPr>
           </a:p>
         </p:txBody>
       </p:sp>
@@ -6956,6 +7072,7 @@
               </a:defRPr>
             </a:pPr>
             <a:r>
+              <a:rPr/>
               <a:t>3</a:t>
             </a:r>
           </a:p>
@@ -6970,7 +7087,7 @@
         <p:spPr>
           <a:xfrm>
             <a:off x="1188720" y="2377440"/>
-            <a:ext cx="3657600" cy="274320"/>
+            <a:ext cx="3657600" cy="301752"/>
           </a:xfrm>
           <a:prstGeom prst="rect">
             <a:avLst/>
@@ -6992,6 +7109,7 @@
               </a:defRPr>
             </a:pPr>
             <a:r>
+              <a:rPr/>
               <a:t>「最近の経験に影響されてない？」</a:t>
             </a:r>
           </a:p>
@@ -7028,6 +7146,7 @@
               </a:defRPr>
             </a:pPr>
             <a:r>
+              <a:rPr/>
               <a:t>利用可能性対策</a:t>
             </a:r>
           </a:p>
@@ -7064,6 +7183,7 @@
               </a:defRPr>
             </a:pPr>
             <a:r>
+              <a:rPr/>
               <a:t>先週の出来事と今回は別物</a:t>
             </a:r>
           </a:p>
@@ -7108,7 +7228,9 @@
           <a:bodyPr rtlCol="0" anchor="ctr"/>
           <a:lstStyle/>
           <a:p>
-            <a:pPr algn="ctr"/>
+            <a:pPr algn="ctr">
+              <a:defRPr/>
+            </a:pPr>
           </a:p>
         </p:txBody>
       </p:sp>
@@ -7143,6 +7265,7 @@
               </a:defRPr>
             </a:pPr>
             <a:r>
+              <a:rPr/>
               <a:t>4</a:t>
             </a:r>
           </a:p>
@@ -7157,7 +7280,7 @@
         <p:spPr>
           <a:xfrm>
             <a:off x="1188720" y="3108960"/>
-            <a:ext cx="3657600" cy="274320"/>
+            <a:ext cx="3657600" cy="301752"/>
           </a:xfrm>
           <a:prstGeom prst="rect">
             <a:avLst/>
@@ -7179,6 +7302,7 @@
               </a:defRPr>
             </a:pPr>
             <a:r>
+              <a:rPr/>
               <a:t>「どれくらい確信がある？根拠は？」</a:t>
             </a:r>
           </a:p>
@@ -7215,6 +7339,7 @@
               </a:defRPr>
             </a:pPr>
             <a:r>
+              <a:rPr/>
               <a:t>過信対策</a:t>
             </a:r>
           </a:p>
@@ -7251,6 +7376,7 @@
               </a:defRPr>
             </a:pPr>
             <a:r>
+              <a:rPr/>
               <a:t>「なんとなく大丈夫」を言語化</a:t>
             </a:r>
           </a:p>
@@ -7295,7 +7421,9 @@
           <a:bodyPr rtlCol="0" anchor="ctr"/>
           <a:lstStyle/>
           <a:p>
-            <a:pPr algn="ctr"/>
+            <a:pPr algn="ctr">
+              <a:defRPr/>
+            </a:pPr>
           </a:p>
         </p:txBody>
       </p:sp>
@@ -7330,6 +7458,7 @@
               </a:defRPr>
             </a:pPr>
             <a:r>
+              <a:rPr/>
               <a:t>5</a:t>
             </a:r>
           </a:p>
@@ -7344,7 +7473,7 @@
         <p:spPr>
           <a:xfrm>
             <a:off x="1188720" y="3840480"/>
-            <a:ext cx="3657600" cy="274320"/>
+            <a:ext cx="3657600" cy="301752"/>
           </a:xfrm>
           <a:prstGeom prst="rect">
             <a:avLst/>
@@ -7366,6 +7495,7 @@
               </a:defRPr>
             </a:pPr>
             <a:r>
+              <a:rPr/>
               <a:t>「もし間違っていたら？」</a:t>
             </a:r>
           </a:p>
@@ -7402,6 +7532,7 @@
               </a:defRPr>
             </a:pPr>
             <a:r>
+              <a:rPr/>
               <a:t>総合チェック</a:t>
             </a:r>
           </a:p>
@@ -7438,6 +7569,7 @@
               </a:defRPr>
             </a:pPr>
             <a:r>
+              <a:rPr/>
               <a:t>最悪のケースを先に想像する</a:t>
             </a:r>
           </a:p>
@@ -7477,7 +7609,7 @@
         </p:nvSpPr>
         <p:spPr>
           <a:xfrm>
-            <a:off x="457200" y="274320"/>
+            <a:off x="457200" y="384048"/>
             <a:ext cx="8229600" cy="457200"/>
           </a:xfrm>
           <a:prstGeom prst="rect">
@@ -7500,6 +7632,7 @@
               </a:defRPr>
             </a:pPr>
             <a:r>
+              <a:rPr/>
               <a:t>ダブルチェックの本当の意味</a:t>
             </a:r>
           </a:p>
@@ -7544,7 +7677,9 @@
           <a:bodyPr rtlCol="0" anchor="ctr"/>
           <a:lstStyle/>
           <a:p>
-            <a:pPr algn="ctr"/>
+            <a:pPr algn="ctr">
+              <a:defRPr/>
+            </a:pPr>
           </a:p>
         </p:txBody>
       </p:sp>
@@ -7579,6 +7714,7 @@
               </a:defRPr>
             </a:pPr>
             <a:r>
+              <a:rPr/>
               <a:t>[ガニェ事象5: 学習の指針を与える]</a:t>
             </a:r>
           </a:p>
@@ -7623,7 +7759,9 @@
           <a:bodyPr rtlCol="0" anchor="ctr"/>
           <a:lstStyle/>
           <a:p>
-            <a:pPr algn="ctr"/>
+            <a:pPr algn="ctr">
+              <a:defRPr/>
+            </a:pPr>
           </a:p>
         </p:txBody>
       </p:sp>
@@ -7668,7 +7806,9 @@
           <a:bodyPr rtlCol="0" anchor="ctr"/>
           <a:lstStyle/>
           <a:p>
-            <a:pPr algn="ctr"/>
+            <a:pPr algn="ctr">
+              <a:defRPr/>
+            </a:pPr>
           </a:p>
         </p:txBody>
       </p:sp>
@@ -7703,10 +7843,12 @@
               </a:defRPr>
             </a:pPr>
             <a:r>
+              <a:rPr/>
               <a:t>ダブルチェックは「2回確認すること」ではありません。</a:t>
             </a:r>
             <a:br/>
             <a:r>
+              <a:rPr/>
               <a:t>「別の視点で確認すること」です</a:t>
             </a:r>
           </a:p>
@@ -7753,7 +7895,9 @@
           <a:bodyPr rtlCol="0" anchor="ctr"/>
           <a:lstStyle/>
           <a:p>
-            <a:pPr algn="ctr"/>
+            <a:pPr algn="ctr">
+              <a:defRPr/>
+            </a:pPr>
           </a:p>
         </p:txBody>
       </p:sp>
@@ -7766,7 +7910,7 @@
         <p:spPr>
           <a:xfrm>
             <a:off x="640080" y="2103120"/>
-            <a:ext cx="3657600" cy="274320"/>
+            <a:ext cx="3657600" cy="322579"/>
           </a:xfrm>
           <a:prstGeom prst="rect">
             <a:avLst/>
@@ -7788,6 +7932,7 @@
               </a:defRPr>
             </a:pPr>
             <a:r>
+              <a:rPr/>
               <a:t>形骸化しやすいパターン</a:t>
             </a:r>
           </a:p>
@@ -7824,10 +7969,12 @@
               </a:defRPr>
             </a:pPr>
             <a:r>
+              <a:rPr/>
               <a:t>  同じ人が2回見る → 同じバイアスが2回</a:t>
             </a:r>
             <a:br/>
             <a:r>
+              <a:rPr/>
               <a:t>  サインするだけ → チェックリスト疲れ</a:t>
             </a:r>
           </a:p>
@@ -7874,7 +8021,9 @@
           <a:bodyPr rtlCol="0" anchor="ctr"/>
           <a:lstStyle/>
           <a:p>
-            <a:pPr algn="ctr"/>
+            <a:pPr algn="ctr">
+              <a:defRPr/>
+            </a:pPr>
           </a:p>
         </p:txBody>
       </p:sp>
@@ -7887,7 +8036,7 @@
         <p:spPr>
           <a:xfrm>
             <a:off x="4846320" y="2103120"/>
-            <a:ext cx="3657600" cy="274320"/>
+            <a:ext cx="3657600" cy="322579"/>
           </a:xfrm>
           <a:prstGeom prst="rect">
             <a:avLst/>
@@ -7909,6 +8058,7 @@
               </a:defRPr>
             </a:pPr>
             <a:r>
+              <a:rPr/>
               <a:t>効果的なダブルチェック</a:t>
             </a:r>
           </a:p>
@@ -7945,14 +8095,17 @@
               </a:defRPr>
             </a:pPr>
             <a:r>
+              <a:rPr/>
               <a:t>  別の人が独立して確認</a:t>
             </a:r>
             <a:br/>
             <a:r>
+              <a:rPr/>
               <a:t>  「何を確認するか」を明確に</a:t>
             </a:r>
             <a:br/>
             <a:r>
+              <a:rPr/>
               <a:t>  「おかしい」と思ったら声を出す</a:t>
             </a:r>
           </a:p>
@@ -7989,6 +8142,7 @@
               </a:defRPr>
             </a:pPr>
             <a:r>
+              <a:rPr/>
               <a:t>Devil's Advocate: 誰かが「本当にそれで合ってる？」と問う — 批判ではなく安全の仕組み</a:t>
             </a:r>
           </a:p>
@@ -8028,7 +8182,7 @@
         </p:nvSpPr>
         <p:spPr>
           <a:xfrm>
-            <a:off x="457200" y="274320"/>
+            <a:off x="457200" y="384048"/>
             <a:ext cx="8229600" cy="457200"/>
           </a:xfrm>
           <a:prstGeom prst="rect">
@@ -8051,6 +8205,7 @@
               </a:defRPr>
             </a:pPr>
             <a:r>
+              <a:rPr/>
               <a:t>「自分もバイアスを持つ」= 強さ</a:t>
             </a:r>
           </a:p>
@@ -8095,7 +8250,9 @@
           <a:bodyPr rtlCol="0" anchor="ctr"/>
           <a:lstStyle/>
           <a:p>
-            <a:pPr algn="ctr"/>
+            <a:pPr algn="ctr">
+              <a:defRPr/>
+            </a:pPr>
           </a:p>
         </p:txBody>
       </p:sp>
@@ -8130,6 +8287,7 @@
               </a:defRPr>
             </a:pPr>
             <a:r>
+              <a:rPr/>
               <a:t>[ガニェ事象5: 学習の指針を与える]</a:t>
             </a:r>
           </a:p>
@@ -8174,7 +8332,9 @@
           <a:bodyPr rtlCol="0" anchor="ctr"/>
           <a:lstStyle/>
           <a:p>
-            <a:pPr algn="ctr"/>
+            <a:pPr algn="ctr">
+              <a:defRPr/>
+            </a:pPr>
           </a:p>
         </p:txBody>
       </p:sp>
@@ -8187,7 +8347,7 @@
         <p:spPr>
           <a:xfrm>
             <a:off x="640080" y="1051560"/>
-            <a:ext cx="3657600" cy="274320"/>
+            <a:ext cx="3657600" cy="301752"/>
           </a:xfrm>
           <a:prstGeom prst="rect">
             <a:avLst/>
@@ -8209,6 +8369,7 @@
               </a:defRPr>
             </a:pPr>
             <a:r>
+              <a:rPr/>
               <a:t>従来の考え方</a:t>
             </a:r>
           </a:p>
@@ -8245,10 +8406,12 @@
               </a:defRPr>
             </a:pPr>
             <a:r>
+              <a:rPr/>
               <a:t>「あなたはバイアスに陥っていた」</a:t>
             </a:r>
             <a:br/>
             <a:r>
+              <a:rPr/>
               <a:t>→ 個人の失敗、恥ずかしいこと</a:t>
             </a:r>
           </a:p>
@@ -8293,7 +8456,9 @@
           <a:bodyPr rtlCol="0" anchor="ctr"/>
           <a:lstStyle/>
           <a:p>
-            <a:pPr algn="ctr"/>
+            <a:pPr algn="ctr">
+              <a:defRPr/>
+            </a:pPr>
           </a:p>
         </p:txBody>
       </p:sp>
@@ -8306,7 +8471,7 @@
         <p:spPr>
           <a:xfrm>
             <a:off x="4846320" y="1051560"/>
-            <a:ext cx="3657600" cy="274320"/>
+            <a:ext cx="3657600" cy="301752"/>
           </a:xfrm>
           <a:prstGeom prst="rect">
             <a:avLst/>
@@ -8328,6 +8493,7 @@
               </a:defRPr>
             </a:pPr>
             <a:r>
+              <a:rPr/>
               <a:t>システムエラーの考え方</a:t>
             </a:r>
           </a:p>
@@ -8364,10 +8530,12 @@
               </a:defRPr>
             </a:pPr>
             <a:r>
+              <a:rPr/>
               <a:t>「脳の仕組みとして全員に起きる」</a:t>
             </a:r>
             <a:br/>
             <a:r>
+              <a:rPr/>
               <a:t>→ 対策可能な特性として理解</a:t>
             </a:r>
           </a:p>
@@ -8404,6 +8572,7 @@
               </a:defRPr>
             </a:pPr>
             <a:r>
+              <a:rPr/>
               <a:t>メタ認知 = 自分の考え方について考える力</a:t>
             </a:r>
           </a:p>
@@ -8440,10 +8609,12 @@
               </a:defRPr>
             </a:pPr>
             <a:r>
+              <a:rPr/>
               <a:t>バイアスを認められる人 = メタ認知能力が高い人</a:t>
             </a:r>
             <a:br/>
             <a:r>
+              <a:rPr/>
               <a:t>「私、思い込みで判断してたかも」と言えるチーム = 心理的安全性の高いチーム</a:t>
             </a:r>
           </a:p>
@@ -8483,7 +8654,7 @@
         </p:nvSpPr>
         <p:spPr>
           <a:xfrm>
-            <a:off x="457200" y="274320"/>
+            <a:off x="457200" y="384048"/>
             <a:ext cx="8229600" cy="457200"/>
           </a:xfrm>
           <a:prstGeom prst="rect">
@@ -8506,6 +8677,7 @@
               </a:defRPr>
             </a:pPr>
             <a:r>
+              <a:rPr/>
               <a:t>グループワーク — うちのチームでできること（5分）</a:t>
             </a:r>
           </a:p>
@@ -8550,7 +8722,9 @@
           <a:bodyPr rtlCol="0" anchor="ctr"/>
           <a:lstStyle/>
           <a:p>
-            <a:pPr algn="ctr"/>
+            <a:pPr algn="ctr">
+              <a:defRPr/>
+            </a:pPr>
           </a:p>
         </p:txBody>
       </p:sp>
@@ -8585,6 +8759,7 @@
               </a:defRPr>
             </a:pPr>
             <a:r>
+              <a:rPr/>
               <a:t>[ガニェ事象6/7: 練習＋フィードバック]</a:t>
             </a:r>
           </a:p>
@@ -8629,7 +8804,9 @@
           <a:bodyPr rtlCol="0" anchor="ctr"/>
           <a:lstStyle/>
           <a:p>
-            <a:pPr algn="ctr"/>
+            <a:pPr algn="ctr">
+              <a:defRPr/>
+            </a:pPr>
           </a:p>
         </p:txBody>
       </p:sp>
@@ -8674,7 +8851,9 @@
           <a:bodyPr rtlCol="0" anchor="ctr"/>
           <a:lstStyle/>
           <a:p>
-            <a:pPr algn="ctr"/>
+            <a:pPr algn="ctr">
+              <a:defRPr/>
+            </a:pPr>
           </a:p>
         </p:txBody>
       </p:sp>
@@ -8709,14 +8888,17 @@
               </a:defRPr>
             </a:pPr>
             <a:r>
+              <a:rPr/>
               <a:t>「あなたの職場で、認知バイアスが原因で</a:t>
             </a:r>
             <a:br/>
             <a:r>
+              <a:rPr/>
               <a:t>“ヒヤリ”とした経験はありますか？</a:t>
             </a:r>
             <a:br/>
             <a:r>
+              <a:rPr/>
               <a:t>そのとき、どんな“仕組み”があれば防げましたか？」</a:t>
             </a:r>
           </a:p>
@@ -8753,6 +8935,7 @@
               </a:defRPr>
             </a:pPr>
             <a:r>
+              <a:rPr/>
               <a:t>ステップ1（2分）: バイアスが入り込みやすい場面を特定</a:t>
             </a:r>
           </a:p>
@@ -8767,7 +8950,7 @@
         <p:spPr>
           <a:xfrm>
             <a:off x="914400" y="2834640"/>
-            <a:ext cx="7498079" cy="274320"/>
+            <a:ext cx="7498079" cy="287020"/>
           </a:xfrm>
           <a:prstGeom prst="rect">
             <a:avLst/>
@@ -8789,6 +8972,7 @@
               </a:defRPr>
             </a:pPr>
             <a:r>
+              <a:rPr/>
               <a:t>  例: 申し送り、トリアージ、投薬確認、電話対応...</a:t>
             </a:r>
           </a:p>
@@ -8803,7 +8987,7 @@
         <p:spPr>
           <a:xfrm>
             <a:off x="731520" y="3200400"/>
-            <a:ext cx="7680960" cy="274320"/>
+            <a:ext cx="7680960" cy="322579"/>
           </a:xfrm>
           <a:prstGeom prst="rect">
             <a:avLst/>
@@ -8825,6 +9009,7 @@
               </a:defRPr>
             </a:pPr>
             <a:r>
+              <a:rPr/>
               <a:t>ステップ2（2分）: 明日からできるバイアス対策を1つ考える</a:t>
             </a:r>
           </a:p>
@@ -8839,7 +9024,7 @@
         <p:spPr>
           <a:xfrm>
             <a:off x="731520" y="3840480"/>
-            <a:ext cx="7680960" cy="274320"/>
+            <a:ext cx="7680960" cy="322579"/>
           </a:xfrm>
           <a:prstGeom prst="rect">
             <a:avLst/>
@@ -8861,6 +9046,7 @@
               </a:defRPr>
             </a:pPr>
             <a:r>
+              <a:rPr/>
               <a:t>ステップ3（1分）: グループのアイデアを1つ発表</a:t>
             </a:r>
           </a:p>
@@ -8875,7 +9061,7 @@
         <p:spPr>
           <a:xfrm>
             <a:off x="731520" y="4297680"/>
-            <a:ext cx="7680960" cy="274320"/>
+            <a:ext cx="7680960" cy="287020"/>
           </a:xfrm>
           <a:prstGeom prst="rect">
             <a:avLst/>
@@ -8897,6 +9083,7 @@
               </a:defRPr>
             </a:pPr>
             <a:r>
+              <a:rPr/>
               <a:t>「誰が悪い」ではなく「どんな仕組みが必要か」に焦点</a:t>
             </a:r>
           </a:p>
